--- a/slides/Apexmind_presentation.pptx
+++ b/slides/Apexmind_presentation.pptx
@@ -3453,7 +3453,7 @@
                   <a:srgbClr val="0B1F3A"/>
                 </a:solidFill>
               </a:rPr>
-              <a:t>Coverage: 100/100 answered — 95 via LLM, 5 via evidence fallback, 0 Unknown</a:t>
+              <a:t>Coverage: 100/100 answered — 96 via LLM, 4 via evidence fallback, 0 Unknown</a:t>
             </a:r>
           </a:p>
           <a:p>
